--- a/data/09_internal_training/training_13.pptx
+++ b/data/09_internal_training/training_13.pptx
@@ -3140,12 +3140,12 @@
           <a:p/>
           <a:p>
             <a:r>
-              <a:t>华辰资本旗下的 HC Global Macro Fund 在最近的资产配置会议中</a:t>
-            </a:r>
-          </a:p>
-          <a:p>
-            <a:r>
-              <a:t>讨论了 消费科技 行业的投资机会，并对 银嘉信息有限公司</a:t>
+              <a:t>华辰资本旗下的 HC Quant Arbitrage Fund 在最近的资产配置会议中</a:t>
+            </a:r>
+          </a:p>
+          <a:p>
+            <a:r>
+              <a:t>讨论了 半导体 行业的投资机会，并对 精芯信息有限公司</a:t>
             </a:r>
           </a:p>
           <a:p>
@@ -3157,29 +3157,7 @@
           <a:p/>
           <a:p>
             <a:r>
-              <a:t>天益信息有限公司 是中国 云计算 行业的重要企业之一。</a:t>
-            </a:r>
-          </a:p>
-          <a:p>
-            <a:r>
-              <a:t>根据华辰资本 投资策略部 的研究，该公司成立于 2015 年，</a:t>
-            </a:r>
-          </a:p>
-          <a:p>
-            <a:r>
-              <a:t>目前员工规模约 6900 人。公司近年来持续加大研发投入，</a:t>
-            </a:r>
-          </a:p>
-          <a:p>
-            <a:r>
-              <a:t>在核心技术方面形成了较强的竞争壁垒。</a:t>
-            </a:r>
-          </a:p>
-          <a:p/>
-          <a:p/>
-          <a:p>
-            <a:r>
-              <a:t>从产业链角度看，消费科技 行业主要由上游设备厂商、</a:t>
+              <a:t>从产业链角度看，医疗科技 行业主要由上游设备厂商、</a:t>
             </a:r>
           </a:p>
           <a:p>
@@ -3189,7 +3167,24 @@
           </a:p>
           <a:p>
             <a:r>
-              <a:t>昂歌信息科技有限公司 主要位于产业链的 上游 环节。</a:t>
+              <a:t>华成育卓科技有限公司 主要位于产业链的 上游 环节。</a:t>
+            </a:r>
+          </a:p>
+          <a:p/>
+          <a:p/>
+          <a:p>
+            <a:r>
+              <a:t>风险管理部认为，消费科技 行业仍然面临若干</a:t>
+            </a:r>
+          </a:p>
+          <a:p>
+            <a:r>
+              <a:t>不确定性因素，包括技术迭代风险、政策变化、</a:t>
+            </a:r>
+          </a:p>
+          <a:p>
+            <a:r>
+              <a:t>以及市场竞争加剧等问题。</a:t>
             </a:r>
           </a:p>
           <a:p/>
@@ -3251,7 +3246,24 @@
           <a:p/>
           <a:p>
             <a:r>
-              <a:t>从产业链角度看，新能源 行业主要由上游设备厂商、</a:t>
+              <a:t>根据内部财务模型测算，雨林木风计算机科技有限公司 在未来三年</a:t>
+            </a:r>
+          </a:p>
+          <a:p>
+            <a:r>
+              <a:t>收入复合增长率预计可达到 21% 左右。</a:t>
+            </a:r>
+          </a:p>
+          <a:p>
+            <a:r>
+              <a:t>该预测基于行业需求增长以及公司产能扩张计划。</a:t>
+            </a:r>
+          </a:p>
+          <a:p/>
+          <a:p/>
+          <a:p>
+            <a:r>
+              <a:t>从产业链角度看，机器人 行业主要由上游设备厂商、</a:t>
             </a:r>
           </a:p>
           <a:p>
@@ -3261,41 +3273,24 @@
           </a:p>
           <a:p>
             <a:r>
-              <a:t>鸿睿思博网络有限公司 主要位于产业链的 中游 环节。</a:t>
-            </a:r>
-          </a:p>
-          <a:p/>
-          <a:p/>
-          <a:p>
-            <a:r>
-              <a:t>从产业链角度看，云计算 行业主要由上游设备厂商、</a:t>
-            </a:r>
-          </a:p>
-          <a:p>
-            <a:r>
-              <a:t>中游平台企业以及下游应用厂商组成。</a:t>
-            </a:r>
-          </a:p>
-          <a:p>
-            <a:r>
-              <a:t>精芯科技有限公司 主要位于产业链的 上游 环节。</a:t>
-            </a:r>
-          </a:p>
-          <a:p/>
-          <a:p/>
-          <a:p>
-            <a:r>
-              <a:t>华辰资本旗下的 HC Global Macro Fund 在最近的资产配置会议中</a:t>
-            </a:r>
-          </a:p>
-          <a:p>
-            <a:r>
-              <a:t>讨论了 消费科技 行业的投资机会，并对 精芯信息有限公司</a:t>
-            </a:r>
-          </a:p>
-          <a:p>
-            <a:r>
-              <a:t>进行了重点评估。</a:t>
+              <a:t>图龙信息传媒有限公司 主要位于产业链的 中游 环节。</a:t>
+            </a:r>
+          </a:p>
+          <a:p/>
+          <a:p/>
+          <a:p>
+            <a:r>
+              <a:t>风险管理部认为，新能源 行业仍然面临若干</a:t>
+            </a:r>
+          </a:p>
+          <a:p>
+            <a:r>
+              <a:t>不确定性因素，包括技术迭代风险、政策变化、</a:t>
+            </a:r>
+          </a:p>
+          <a:p>
+            <a:r>
+              <a:t>以及市场竞争加剧等问题。</a:t>
             </a:r>
           </a:p>
           <a:p/>
@@ -3357,34 +3352,34 @@
           <a:p/>
           <a:p>
             <a:r>
-              <a:t>风险管理部认为，人工智能 行业仍然面临若干</a:t>
-            </a:r>
-          </a:p>
-          <a:p>
-            <a:r>
-              <a:t>不确定性因素，包括技术迭代风险、政策变化、</a:t>
-            </a:r>
-          </a:p>
-          <a:p>
-            <a:r>
-              <a:t>以及市场竞争加剧等问题。</a:t>
-            </a:r>
-          </a:p>
-          <a:p/>
-          <a:p/>
-          <a:p>
-            <a:r>
-              <a:t>创亿信息有限公司 是中国 医疗科技 行业的重要企业之一。</a:t>
-            </a:r>
-          </a:p>
-          <a:p>
-            <a:r>
-              <a:t>根据华辰资本 资产配置委员会 的研究，该公司成立于 2007 年，</a:t>
-            </a:r>
-          </a:p>
-          <a:p>
-            <a:r>
-              <a:t>目前员工规模约 7601 人。公司近年来持续加大研发投入，</a:t>
+              <a:t>华辰资本旗下的 HC Alpha Growth Fund 在最近的资产配置会议中</a:t>
+            </a:r>
+          </a:p>
+          <a:p>
+            <a:r>
+              <a:t>讨论了 新能源 行业的投资机会，并对 富罳网络有限公司</a:t>
+            </a:r>
+          </a:p>
+          <a:p>
+            <a:r>
+              <a:t>进行了重点评估。</a:t>
+            </a:r>
+          </a:p>
+          <a:p/>
+          <a:p/>
+          <a:p>
+            <a:r>
+              <a:t>佳禾传媒有限公司 是中国 云计算 行业的重要企业之一。</a:t>
+            </a:r>
+          </a:p>
+          <a:p>
+            <a:r>
+              <a:t>根据华辰资本 资产配置委员会 的研究，该公司成立于 2016 年，</a:t>
+            </a:r>
+          </a:p>
+          <a:p>
+            <a:r>
+              <a:t>目前员工规模约 3802 人。公司近年来持续加大研发投入，</a:t>
             </a:r>
           </a:p>
           <a:p>
@@ -3396,17 +3391,22 @@
           <a:p/>
           <a:p>
             <a:r>
-              <a:t>风险管理部认为，云计算 行业仍然面临若干</a:t>
-            </a:r>
-          </a:p>
-          <a:p>
-            <a:r>
-              <a:t>不确定性因素，包括技术迭代风险、政策变化、</a:t>
-            </a:r>
-          </a:p>
-          <a:p>
-            <a:r>
-              <a:t>以及市场竞争加剧等问题。</a:t>
+              <a:t>信诚致远网络有限公司 是中国 半导体 行业的重要企业之一。</a:t>
+            </a:r>
+          </a:p>
+          <a:p>
+            <a:r>
+              <a:t>根据华辰资本 投资策略部 的研究，该公司成立于 2015 年，</a:t>
+            </a:r>
+          </a:p>
+          <a:p>
+            <a:r>
+              <a:t>目前员工规模约 2901 人。公司近年来持续加大研发投入，</a:t>
+            </a:r>
+          </a:p>
+          <a:p>
+            <a:r>
+              <a:t>在核心技术方面形成了较强的竞争壁垒。</a:t>
             </a:r>
           </a:p>
           <a:p/>
@@ -3468,12 +3468,29 @@
           <a:p/>
           <a:p>
             <a:r>
+              <a:t>根据内部财务模型测算，雨林木风计算机科技有限公司 在未来三年</a:t>
+            </a:r>
+          </a:p>
+          <a:p>
+            <a:r>
+              <a:t>收入复合增长率预计可达到 29% 左右。</a:t>
+            </a:r>
+          </a:p>
+          <a:p>
+            <a:r>
+              <a:t>该预测基于行业需求增长以及公司产能扩张计划。</a:t>
+            </a:r>
+          </a:p>
+          <a:p/>
+          <a:p/>
+          <a:p>
+            <a:r>
               <a:t>华辰资本旗下的 HC Alpha Growth Fund 在最近的资产配置会议中</a:t>
             </a:r>
           </a:p>
           <a:p>
             <a:r>
-              <a:t>讨论了 医疗科技 行业的投资机会，并对 雨林木风计算机网络有限公司</a:t>
+              <a:t>讨论了 人工智能 行业的投资机会，并对 明腾传媒有限公司</a:t>
             </a:r>
           </a:p>
           <a:p>
@@ -3485,34 +3502,22 @@
           <a:p/>
           <a:p>
             <a:r>
-              <a:t>根据内部财务模型测算，兰金电子网络有限公司 在未来三年</a:t>
-            </a:r>
-          </a:p>
-          <a:p>
-            <a:r>
-              <a:t>收入复合增长率预计可达到 11% 左右。</a:t>
-            </a:r>
-          </a:p>
-          <a:p>
-            <a:r>
-              <a:t>该预测基于行业需求增长以及公司产能扩张计划。</a:t>
-            </a:r>
-          </a:p>
-          <a:p/>
-          <a:p/>
-          <a:p>
-            <a:r>
-              <a:t>根据内部财务模型测算，银嘉信息有限公司 在未来三年</a:t>
-            </a:r>
-          </a:p>
-          <a:p>
-            <a:r>
-              <a:t>收入复合增长率预计可达到 33% 左右。</a:t>
-            </a:r>
-          </a:p>
-          <a:p>
-            <a:r>
-              <a:t>该预测基于行业需求增长以及公司产能扩张计划。</a:t>
+              <a:t>良诺科技有限公司 是中国 云计算 行业的重要企业之一。</a:t>
+            </a:r>
+          </a:p>
+          <a:p>
+            <a:r>
+              <a:t>根据华辰资本 投资策略部 的研究，该公司成立于 2016 年，</a:t>
+            </a:r>
+          </a:p>
+          <a:p>
+            <a:r>
+              <a:t>目前员工规模约 1663 人。公司近年来持续加大研发投入，</a:t>
+            </a:r>
+          </a:p>
+          <a:p>
+            <a:r>
+              <a:t>在核心技术方面形成了较强的竞争壁垒。</a:t>
             </a:r>
           </a:p>
           <a:p/>
@@ -3574,46 +3579,46 @@
           <a:p/>
           <a:p>
             <a:r>
-              <a:t>从产业链角度看，云计算 行业主要由上游设备厂商、</a:t>
-            </a:r>
-          </a:p>
-          <a:p>
-            <a:r>
-              <a:t>中游平台企业以及下游应用厂商组成。</a:t>
-            </a:r>
-          </a:p>
-          <a:p>
-            <a:r>
-              <a:t>国讯网络有限公司 主要位于产业链的 下游 环节。</a:t>
-            </a:r>
-          </a:p>
-          <a:p/>
-          <a:p/>
-          <a:p>
-            <a:r>
-              <a:t>风险管理部认为，半导体 行业仍然面临若干</a:t>
-            </a:r>
-          </a:p>
-          <a:p>
-            <a:r>
-              <a:t>不确定性因素，包括技术迭代风险、政策变化、</a:t>
-            </a:r>
-          </a:p>
-          <a:p>
-            <a:r>
-              <a:t>以及市场竞争加剧等问题。</a:t>
-            </a:r>
-          </a:p>
-          <a:p/>
-          <a:p/>
-          <a:p>
-            <a:r>
               <a:t>华辰资本旗下的 HC Energy Transition Fund 在最近的资产配置会议中</a:t>
             </a:r>
           </a:p>
           <a:p>
             <a:r>
-              <a:t>讨论了 新能源 行业的投资机会，并对 鸿睿思博网络有限公司</a:t>
+              <a:t>讨论了 半导体 行业的投资机会，并对 雨林木风计算机科技有限公司</a:t>
+            </a:r>
+          </a:p>
+          <a:p>
+            <a:r>
+              <a:t>进行了重点评估。</a:t>
+            </a:r>
+          </a:p>
+          <a:p/>
+          <a:p/>
+          <a:p>
+            <a:r>
+              <a:t>华辰资本旗下的 HC Quant Arbitrage Fund 在最近的资产配置会议中</a:t>
+            </a:r>
+          </a:p>
+          <a:p>
+            <a:r>
+              <a:t>讨论了 新能源 行业的投资机会，并对 戴硕电子网络有限公司</a:t>
+            </a:r>
+          </a:p>
+          <a:p>
+            <a:r>
+              <a:t>进行了重点评估。</a:t>
+            </a:r>
+          </a:p>
+          <a:p/>
+          <a:p/>
+          <a:p>
+            <a:r>
+              <a:t>华辰资本旗下的 HC Alpha Growth Fund 在最近的资产配置会议中</a:t>
+            </a:r>
+          </a:p>
+          <a:p>
+            <a:r>
+              <a:t>讨论了 消费科技 行业的投资机会，并对 飞海科技传媒有限公司</a:t>
             </a:r>
           </a:p>
           <a:p>
@@ -3680,24 +3685,29 @@
           <a:p/>
           <a:p>
             <a:r>
-              <a:t>从产业链角度看，半导体 行业主要由上游设备厂商、</a:t>
-            </a:r>
-          </a:p>
-          <a:p>
-            <a:r>
-              <a:t>中游平台企业以及下游应用厂商组成。</a:t>
-            </a:r>
-          </a:p>
-          <a:p>
-            <a:r>
-              <a:t>万迅电脑网络有限公司 主要位于产业链的 上游 环节。</a:t>
-            </a:r>
-          </a:p>
-          <a:p/>
-          <a:p/>
-          <a:p>
-            <a:r>
-              <a:t>风险管理部认为，新能源 行业仍然面临若干</a:t>
+              <a:t>创汇传媒有限公司 是中国 新能源 行业的重要企业之一。</a:t>
+            </a:r>
+          </a:p>
+          <a:p>
+            <a:r>
+              <a:t>根据华辰资本 风险管理部 的研究，该公司成立于 2017 年，</a:t>
+            </a:r>
+          </a:p>
+          <a:p>
+            <a:r>
+              <a:t>目前员工规模约 7084 人。公司近年来持续加大研发投入，</a:t>
+            </a:r>
+          </a:p>
+          <a:p>
+            <a:r>
+              <a:t>在核心技术方面形成了较强的竞争壁垒。</a:t>
+            </a:r>
+          </a:p>
+          <a:p/>
+          <a:p/>
+          <a:p>
+            <a:r>
+              <a:t>风险管理部认为，半导体 行业仍然面临若干</a:t>
             </a:r>
           </a:p>
           <a:p>
@@ -3714,12 +3724,12 @@
           <a:p/>
           <a:p>
             <a:r>
-              <a:t>华辰资本旗下的 HC Global Macro Fund 在最近的资产配置会议中</a:t>
-            </a:r>
-          </a:p>
-          <a:p>
-            <a:r>
-              <a:t>讨论了 新能源 行业的投资机会，并对 飞利信科技有限公司</a:t>
+              <a:t>华辰资本旗下的 HC Quant Arbitrage Fund 在最近的资产配置会议中</a:t>
+            </a:r>
+          </a:p>
+          <a:p>
+            <a:r>
+              <a:t>讨论了 机器人 行业的投资机会，并对 图龙信息传媒有限公司</a:t>
             </a:r>
           </a:p>
           <a:p>
@@ -3786,41 +3796,7 @@
           <a:p/>
           <a:p>
             <a:r>
-              <a:t>从产业链角度看，人工智能 行业主要由上游设备厂商、</a:t>
-            </a:r>
-          </a:p>
-          <a:p>
-            <a:r>
-              <a:t>中游平台企业以及下游应用厂商组成。</a:t>
-            </a:r>
-          </a:p>
-          <a:p>
-            <a:r>
-              <a:t>迪摩科技有限公司 主要位于产业链的 中游 环节。</a:t>
-            </a:r>
-          </a:p>
-          <a:p/>
-          <a:p/>
-          <a:p>
-            <a:r>
-              <a:t>华辰资本旗下的 HC Energy Transition Fund 在最近的资产配置会议中</a:t>
-            </a:r>
-          </a:p>
-          <a:p>
-            <a:r>
-              <a:t>讨论了 医疗科技 行业的投资机会，并对 创联世纪科技有限公司</a:t>
-            </a:r>
-          </a:p>
-          <a:p>
-            <a:r>
-              <a:t>进行了重点评估。</a:t>
-            </a:r>
-          </a:p>
-          <a:p/>
-          <a:p/>
-          <a:p>
-            <a:r>
-              <a:t>风险管理部认为，半导体 行业仍然面临若干</a:t>
+              <a:t>风险管理部认为，云计算 行业仍然面临若干</a:t>
             </a:r>
           </a:p>
           <a:p>
@@ -3831,6 +3807,40 @@
           <a:p>
             <a:r>
               <a:t>以及市场竞争加剧等问题。</a:t>
+            </a:r>
+          </a:p>
+          <a:p/>
+          <a:p/>
+          <a:p>
+            <a:r>
+              <a:t>根据内部财务模型测算，通际名联网络有限公司 在未来三年</a:t>
+            </a:r>
+          </a:p>
+          <a:p>
+            <a:r>
+              <a:t>收入复合增长率预计可达到 32% 左右。</a:t>
+            </a:r>
+          </a:p>
+          <a:p>
+            <a:r>
+              <a:t>该预测基于行业需求增长以及公司产能扩张计划。</a:t>
+            </a:r>
+          </a:p>
+          <a:p/>
+          <a:p/>
+          <a:p>
+            <a:r>
+              <a:t>根据内部财务模型测算，新格林耐特网络有限公司 在未来三年</a:t>
+            </a:r>
+          </a:p>
+          <a:p>
+            <a:r>
+              <a:t>收入复合增长率预计可达到 13% 左右。</a:t>
+            </a:r>
+          </a:p>
+          <a:p>
+            <a:r>
+              <a:t>该预测基于行业需求增长以及公司产能扩张计划。</a:t>
             </a:r>
           </a:p>
           <a:p/>
@@ -3892,34 +3902,17 @@
           <a:p/>
           <a:p>
             <a:r>
-              <a:t>根据内部财务模型测算，南康网络有限公司 在未来三年</a:t>
-            </a:r>
-          </a:p>
-          <a:p>
-            <a:r>
-              <a:t>收入复合增长率预计可达到 16% 左右。</a:t>
-            </a:r>
-          </a:p>
-          <a:p>
-            <a:r>
-              <a:t>该预测基于行业需求增长以及公司产能扩张计划。</a:t>
-            </a:r>
-          </a:p>
-          <a:p/>
-          <a:p/>
-          <a:p>
-            <a:r>
-              <a:t>东方峻景网络有限公司 是中国 机器人 行业的重要企业之一。</a:t>
-            </a:r>
-          </a:p>
-          <a:p>
-            <a:r>
-              <a:t>根据华辰资本 量化研究部 的研究，该公司成立于 2020 年，</a:t>
-            </a:r>
-          </a:p>
-          <a:p>
-            <a:r>
-              <a:t>目前员工规模约 7859 人。公司近年来持续加大研发投入，</a:t>
+              <a:t>惠派国际公司科技有限公司 是中国 人工智能 行业的重要企业之一。</a:t>
+            </a:r>
+          </a:p>
+          <a:p>
+            <a:r>
+              <a:t>根据华辰资本 量化研究部 的研究，该公司成立于 2019 年，</a:t>
+            </a:r>
+          </a:p>
+          <a:p>
+            <a:r>
+              <a:t>目前员工规模约 6944 人。公司近年来持续加大研发投入，</a:t>
             </a:r>
           </a:p>
           <a:p>
@@ -3931,17 +3924,34 @@
           <a:p/>
           <a:p>
             <a:r>
-              <a:t>风险管理部认为，消费科技 行业仍然面临若干</a:t>
-            </a:r>
-          </a:p>
-          <a:p>
-            <a:r>
-              <a:t>不确定性因素，包括技术迭代风险、政策变化、</a:t>
-            </a:r>
-          </a:p>
-          <a:p>
-            <a:r>
-              <a:t>以及市场竞争加剧等问题。</a:t>
+              <a:t>从产业链角度看，医疗科技 行业主要由上游设备厂商、</a:t>
+            </a:r>
+          </a:p>
+          <a:p>
+            <a:r>
+              <a:t>中游平台企业以及下游应用厂商组成。</a:t>
+            </a:r>
+          </a:p>
+          <a:p>
+            <a:r>
+              <a:t>迪摩信息有限公司 主要位于产业链的 下游 环节。</a:t>
+            </a:r>
+          </a:p>
+          <a:p/>
+          <a:p/>
+          <a:p>
+            <a:r>
+              <a:t>从产业链角度看，半导体 行业主要由上游设备厂商、</a:t>
+            </a:r>
+          </a:p>
+          <a:p>
+            <a:r>
+              <a:t>中游平台企业以及下游应用厂商组成。</a:t>
+            </a:r>
+          </a:p>
+          <a:p>
+            <a:r>
+              <a:t>华泰通安网络有限公司 主要位于产业链的 下游 环节。</a:t>
             </a:r>
           </a:p>
           <a:p/>
@@ -4003,39 +4013,34 @@
           <a:p/>
           <a:p>
             <a:r>
-              <a:t>根据内部财务模型测算，创汇传媒有限公司 在未来三年</a:t>
-            </a:r>
-          </a:p>
-          <a:p>
-            <a:r>
-              <a:t>收入复合增长率预计可达到 10% 左右。</a:t>
+              <a:t>风险管理部认为，人工智能 行业仍然面临若干</a:t>
+            </a:r>
+          </a:p>
+          <a:p>
+            <a:r>
+              <a:t>不确定性因素，包括技术迭代风险、政策变化、</a:t>
+            </a:r>
+          </a:p>
+          <a:p>
+            <a:r>
+              <a:t>以及市场竞争加剧等问题。</a:t>
+            </a:r>
+          </a:p>
+          <a:p/>
+          <a:p/>
+          <a:p>
+            <a:r>
+              <a:t>根据内部财务模型测算，浦华众城网络有限公司 在未来三年</a:t>
+            </a:r>
+          </a:p>
+          <a:p>
+            <a:r>
+              <a:t>收入复合增长率预计可达到 33% 左右。</a:t>
             </a:r>
           </a:p>
           <a:p>
             <a:r>
               <a:t>该预测基于行业需求增长以及公司产能扩张计划。</a:t>
-            </a:r>
-          </a:p>
-          <a:p/>
-          <a:p/>
-          <a:p>
-            <a:r>
-              <a:t>九方信息有限公司 是中国 新能源 行业的重要企业之一。</a:t>
-            </a:r>
-          </a:p>
-          <a:p>
-            <a:r>
-              <a:t>根据华辰资本 资产配置委员会 的研究，该公司成立于 2011 年，</a:t>
-            </a:r>
-          </a:p>
-          <a:p>
-            <a:r>
-              <a:t>目前员工规模约 6198 人。公司近年来持续加大研发投入，</a:t>
-            </a:r>
-          </a:p>
-          <a:p>
-            <a:r>
-              <a:t>在核心技术方面形成了较强的竞争壁垒。</a:t>
             </a:r>
           </a:p>
           <a:p/>
@@ -4114,7 +4119,7 @@
           <a:p/>
           <a:p>
             <a:r>
-              <a:t>从产业链角度看，消费科技 行业主要由上游设备厂商、</a:t>
+              <a:t>从产业链角度看，云计算 行业主要由上游设备厂商、</a:t>
             </a:r>
           </a:p>
           <a:p>
@@ -4124,14 +4129,14 @@
           </a:p>
           <a:p>
             <a:r>
-              <a:t>兰金电子网络有限公司 主要位于产业链的 上游 环节。</a:t>
-            </a:r>
-          </a:p>
-          <a:p/>
-          <a:p/>
-          <a:p>
-            <a:r>
-              <a:t>从产业链角度看，半导体 行业主要由上游设备厂商、</a:t>
+              <a:t>良诺科技有限公司 主要位于产业链的 中游 环节。</a:t>
+            </a:r>
+          </a:p>
+          <a:p/>
+          <a:p/>
+          <a:p>
+            <a:r>
+              <a:t>从产业链角度看，医疗科技 行业主要由上游设备厂商、</a:t>
             </a:r>
           </a:p>
           <a:p>
@@ -4141,24 +4146,29 @@
           </a:p>
           <a:p>
             <a:r>
-              <a:t>万迅电脑网络有限公司 主要位于产业链的 中游 环节。</a:t>
-            </a:r>
-          </a:p>
-          <a:p/>
-          <a:p/>
-          <a:p>
-            <a:r>
-              <a:t>华辰资本旗下的 HC Energy Transition Fund 在最近的资产配置会议中</a:t>
-            </a:r>
-          </a:p>
-          <a:p>
-            <a:r>
-              <a:t>讨论了 半导体 行业的投资机会，并对 鸿睿思博信息有限公司</a:t>
-            </a:r>
-          </a:p>
-          <a:p>
-            <a:r>
-              <a:t>进行了重点评估。</a:t>
+              <a:t>华成育卓科技有限公司 主要位于产业链的 上游 环节。</a:t>
+            </a:r>
+          </a:p>
+          <a:p/>
+          <a:p/>
+          <a:p>
+            <a:r>
+              <a:t>雨林木风计算机科技有限公司 是中国 半导体 行业的重要企业之一。</a:t>
+            </a:r>
+          </a:p>
+          <a:p>
+            <a:r>
+              <a:t>根据华辰资本 投资委员会 的研究，该公司成立于 2007 年，</a:t>
+            </a:r>
+          </a:p>
+          <a:p>
+            <a:r>
+              <a:t>目前员工规模约 7826 人。公司近年来持续加大研发投入，</a:t>
+            </a:r>
+          </a:p>
+          <a:p>
+            <a:r>
+              <a:t>在核心技术方面形成了较强的竞争壁垒。</a:t>
             </a:r>
           </a:p>
           <a:p/>
@@ -4220,34 +4230,12 @@
           <a:p/>
           <a:p>
             <a:r>
-              <a:t>雨林木风计算机科技有限公司 是中国 人工智能 行业的重要企业之一。</a:t>
-            </a:r>
-          </a:p>
-          <a:p>
-            <a:r>
-              <a:t>根据华辰资本 投资策略部 的研究，该公司成立于 2019 年，</a:t>
-            </a:r>
-          </a:p>
-          <a:p>
-            <a:r>
-              <a:t>目前员工规模约 1578 人。公司近年来持续加大研发投入，</a:t>
-            </a:r>
-          </a:p>
-          <a:p>
-            <a:r>
-              <a:t>在核心技术方面形成了较强的竞争壁垒。</a:t>
-            </a:r>
-          </a:p>
-          <a:p/>
-          <a:p/>
-          <a:p>
-            <a:r>
-              <a:t>华辰资本旗下的 HC Energy Transition Fund 在最近的资产配置会议中</a:t>
-            </a:r>
-          </a:p>
-          <a:p>
-            <a:r>
-              <a:t>讨论了 消费科技 行业的投资机会，并对 精芯信息有限公司</a:t>
+              <a:t>华辰资本旗下的 HC AI Innovation Fund 在最近的资产配置会议中</a:t>
+            </a:r>
+          </a:p>
+          <a:p>
+            <a:r>
+              <a:t>讨论了 医疗科技 行业的投资机会，并对 九方传媒有限公司</a:t>
             </a:r>
           </a:p>
           <a:p>
@@ -4259,12 +4247,29 @@
           <a:p/>
           <a:p>
             <a:r>
+              <a:t>从产业链角度看，消费科技 行业主要由上游设备厂商、</a:t>
+            </a:r>
+          </a:p>
+          <a:p>
+            <a:r>
+              <a:t>中游平台企业以及下游应用厂商组成。</a:t>
+            </a:r>
+          </a:p>
+          <a:p>
+            <a:r>
+              <a:t>联通时科传媒有限公司 主要位于产业链的 下游 环节。</a:t>
+            </a:r>
+          </a:p>
+          <a:p/>
+          <a:p/>
+          <a:p>
+            <a:r>
               <a:t>华辰资本旗下的 HC Alpha Growth Fund 在最近的资产配置会议中</a:t>
             </a:r>
           </a:p>
           <a:p>
             <a:r>
-              <a:t>讨论了 新能源 行业的投资机会，并对 鸿睿思博网络有限公司</a:t>
+              <a:t>讨论了 云计算 行业的投资机会，并对 佳禾传媒有限公司</a:t>
             </a:r>
           </a:p>
           <a:p>
@@ -4331,12 +4336,12 @@
           <a:p/>
           <a:p>
             <a:r>
-              <a:t>华辰资本旗下的 HC Global Macro Fund 在最近的资产配置会议中</a:t>
-            </a:r>
-          </a:p>
-          <a:p>
-            <a:r>
-              <a:t>讨论了 新能源 行业的投资机会，并对 快讯网络有限公司</a:t>
+              <a:t>华辰资本旗下的 HC Energy Transition Fund 在最近的资产配置会议中</a:t>
+            </a:r>
+          </a:p>
+          <a:p>
+            <a:r>
+              <a:t>讨论了 消费科技 行业的投资机会，并对 鑫博腾飞信息有限公司</a:t>
             </a:r>
           </a:p>
           <a:p>
@@ -4348,34 +4353,39 @@
           <a:p/>
           <a:p>
             <a:r>
-              <a:t>根据内部财务模型测算，易动力科技有限公司 在未来三年</a:t>
-            </a:r>
-          </a:p>
-          <a:p>
-            <a:r>
-              <a:t>收入复合增长率预计可达到 14% 左右。</a:t>
-            </a:r>
-          </a:p>
-          <a:p>
-            <a:r>
-              <a:t>该预测基于行业需求增长以及公司产能扩张计划。</a:t>
-            </a:r>
-          </a:p>
-          <a:p/>
-          <a:p/>
-          <a:p>
-            <a:r>
-              <a:t>从产业链角度看，消费科技 行业主要由上游设备厂商、</a:t>
-            </a:r>
-          </a:p>
-          <a:p>
-            <a:r>
-              <a:t>中游平台企业以及下游应用厂商组成。</a:t>
-            </a:r>
-          </a:p>
-          <a:p>
-            <a:r>
-              <a:t>和泰传媒有限公司 主要位于产业链的 中游 环节。</a:t>
+              <a:t>风险管理部认为，半导体 行业仍然面临若干</a:t>
+            </a:r>
+          </a:p>
+          <a:p>
+            <a:r>
+              <a:t>不确定性因素，包括技术迭代风险、政策变化、</a:t>
+            </a:r>
+          </a:p>
+          <a:p>
+            <a:r>
+              <a:t>以及市场竞争加剧等问题。</a:t>
+            </a:r>
+          </a:p>
+          <a:p/>
+          <a:p/>
+          <a:p>
+            <a:r>
+              <a:t>良诺科技有限公司 是中国 云计算 行业的重要企业之一。</a:t>
+            </a:r>
+          </a:p>
+          <a:p>
+            <a:r>
+              <a:t>根据华辰资本 风险管理部 的研究，该公司成立于 2016 年，</a:t>
+            </a:r>
+          </a:p>
+          <a:p>
+            <a:r>
+              <a:t>目前员工规模约 1663 人。公司近年来持续加大研发投入，</a:t>
+            </a:r>
+          </a:p>
+          <a:p>
+            <a:r>
+              <a:t>在核心技术方面形成了较强的竞争壁垒。</a:t>
             </a:r>
           </a:p>
           <a:p/>
@@ -4437,17 +4447,17 @@
           <a:p/>
           <a:p>
             <a:r>
-              <a:t>国讯网络有限公司 是中国 云计算 行业的重要企业之一。</a:t>
-            </a:r>
-          </a:p>
-          <a:p>
-            <a:r>
-              <a:t>根据华辰资本 投资委员会 的研究，该公司成立于 2016 年，</a:t>
-            </a:r>
-          </a:p>
-          <a:p>
-            <a:r>
-              <a:t>目前员工规模约 6348 人。公司近年来持续加大研发投入，</a:t>
+              <a:t>鑫博腾飞信息有限公司 是中国 消费科技 行业的重要企业之一。</a:t>
+            </a:r>
+          </a:p>
+          <a:p>
+            <a:r>
+              <a:t>根据华辰资本 投资策略部 的研究，该公司成立于 2016 年，</a:t>
+            </a:r>
+          </a:p>
+          <a:p>
+            <a:r>
+              <a:t>目前员工规模约 4167 人。公司近年来持续加大研发投入，</a:t>
             </a:r>
           </a:p>
           <a:p>
@@ -4459,34 +4469,44 @@
           <a:p/>
           <a:p>
             <a:r>
-              <a:t>华辰资本旗下的 HC Alpha Growth Fund 在最近的资产配置会议中</a:t>
-            </a:r>
-          </a:p>
-          <a:p>
-            <a:r>
-              <a:t>讨论了 云计算 行业的投资机会，并对 立信电子网络有限公司</a:t>
-            </a:r>
-          </a:p>
-          <a:p>
-            <a:r>
-              <a:t>进行了重点评估。</a:t>
-            </a:r>
-          </a:p>
-          <a:p/>
-          <a:p/>
-          <a:p>
-            <a:r>
-              <a:t>从产业链角度看，新能源 行业主要由上游设备厂商、</a:t>
-            </a:r>
-          </a:p>
-          <a:p>
-            <a:r>
-              <a:t>中游平台企业以及下游应用厂商组成。</a:t>
-            </a:r>
-          </a:p>
-          <a:p>
-            <a:r>
-              <a:t>东方峻景传媒有限公司 主要位于产业链的 中游 环节。</a:t>
+              <a:t>昂歌信息信息有限公司 是中国 消费科技 行业的重要企业之一。</a:t>
+            </a:r>
+          </a:p>
+          <a:p>
+            <a:r>
+              <a:t>根据华辰资本 风险管理部 的研究，该公司成立于 2010 年，</a:t>
+            </a:r>
+          </a:p>
+          <a:p>
+            <a:r>
+              <a:t>目前员工规模约 7892 人。公司近年来持续加大研发投入，</a:t>
+            </a:r>
+          </a:p>
+          <a:p>
+            <a:r>
+              <a:t>在核心技术方面形成了较强的竞争壁垒。</a:t>
+            </a:r>
+          </a:p>
+          <a:p/>
+          <a:p/>
+          <a:p>
+            <a:r>
+              <a:t>明腾传媒有限公司 是中国 人工智能 行业的重要企业之一。</a:t>
+            </a:r>
+          </a:p>
+          <a:p>
+            <a:r>
+              <a:t>根据华辰资本 风险管理部 的研究，该公司成立于 2011 年，</a:t>
+            </a:r>
+          </a:p>
+          <a:p>
+            <a:r>
+              <a:t>目前员工规模约 2688 人。公司近年来持续加大研发投入，</a:t>
+            </a:r>
+          </a:p>
+          <a:p>
+            <a:r>
+              <a:t>在核心技术方面形成了较强的竞争壁垒。</a:t>
             </a:r>
           </a:p>
           <a:p/>
@@ -4548,56 +4568,56 @@
           <a:p/>
           <a:p>
             <a:r>
-              <a:t>华辰资本旗下的 HC Global Macro Fund 在最近的资产配置会议中</a:t>
-            </a:r>
-          </a:p>
-          <a:p>
-            <a:r>
-              <a:t>讨论了 机器人 行业的投资机会，并对 济南亿次元网络有限公司</a:t>
-            </a:r>
-          </a:p>
-          <a:p>
-            <a:r>
-              <a:t>进行了重点评估。</a:t>
-            </a:r>
-          </a:p>
-          <a:p/>
-          <a:p/>
-          <a:p>
-            <a:r>
-              <a:t>根据内部财务模型测算，创亿信息有限公司 在未来三年</a:t>
-            </a:r>
-          </a:p>
-          <a:p>
-            <a:r>
-              <a:t>收入复合增长率预计可达到 18% 左右。</a:t>
+              <a:t>联软科技有限公司 是中国 消费科技 行业的重要企业之一。</a:t>
+            </a:r>
+          </a:p>
+          <a:p>
+            <a:r>
+              <a:t>根据华辰资本 投资策略部 的研究，该公司成立于 2009 年，</a:t>
+            </a:r>
+          </a:p>
+          <a:p>
+            <a:r>
+              <a:t>目前员工规模约 7080 人。公司近年来持续加大研发投入，</a:t>
+            </a:r>
+          </a:p>
+          <a:p>
+            <a:r>
+              <a:t>在核心技术方面形成了较强的竞争壁垒。</a:t>
+            </a:r>
+          </a:p>
+          <a:p/>
+          <a:p/>
+          <a:p>
+            <a:r>
+              <a:t>风险管理部认为，医疗科技 行业仍然面临若干</a:t>
+            </a:r>
+          </a:p>
+          <a:p>
+            <a:r>
+              <a:t>不确定性因素，包括技术迭代风险、政策变化、</a:t>
+            </a:r>
+          </a:p>
+          <a:p>
+            <a:r>
+              <a:t>以及市场竞争加剧等问题。</a:t>
+            </a:r>
+          </a:p>
+          <a:p/>
+          <a:p/>
+          <a:p>
+            <a:r>
+              <a:t>根据内部财务模型测算，富罳网络有限公司 在未来三年</a:t>
+            </a:r>
+          </a:p>
+          <a:p>
+            <a:r>
+              <a:t>收入复合增长率预计可达到 14% 左右。</a:t>
             </a:r>
           </a:p>
           <a:p>
             <a:r>
               <a:t>该预测基于行业需求增长以及公司产能扩张计划。</a:t>
-            </a:r>
-          </a:p>
-          <a:p/>
-          <a:p/>
-          <a:p>
-            <a:r>
-              <a:t>精芯科技有限公司 是中国 云计算 行业的重要企业之一。</a:t>
-            </a:r>
-          </a:p>
-          <a:p>
-            <a:r>
-              <a:t>根据华辰资本 投资策略部 的研究，该公司成立于 2005 年，</a:t>
-            </a:r>
-          </a:p>
-          <a:p>
-            <a:r>
-              <a:t>目前员工规模约 3520 人。公司近年来持续加大研发投入，</a:t>
-            </a:r>
-          </a:p>
-          <a:p>
-            <a:r>
-              <a:t>在核心技术方面形成了较强的竞争壁垒。</a:t>
             </a:r>
           </a:p>
           <a:p/>
@@ -4659,7 +4679,24 @@
           <a:p/>
           <a:p>
             <a:r>
-              <a:t>风险管理部认为，消费科技 行业仍然面临若干</a:t>
+              <a:t>从产业链角度看，消费科技 行业主要由上游设备厂商、</a:t>
+            </a:r>
+          </a:p>
+          <a:p>
+            <a:r>
+              <a:t>中游平台企业以及下游应用厂商组成。</a:t>
+            </a:r>
+          </a:p>
+          <a:p>
+            <a:r>
+              <a:t>昂歌信息信息有限公司 主要位于产业链的 上游 环节。</a:t>
+            </a:r>
+          </a:p>
+          <a:p/>
+          <a:p/>
+          <a:p>
+            <a:r>
+              <a:t>风险管理部认为，新能源 行业仍然面临若干</a:t>
             </a:r>
           </a:p>
           <a:p>
@@ -4676,34 +4713,22 @@
           <a:p/>
           <a:p>
             <a:r>
-              <a:t>华辰资本旗下的 HC Quant Arbitrage Fund 在最近的资产配置会议中</a:t>
-            </a:r>
-          </a:p>
-          <a:p>
-            <a:r>
-              <a:t>讨论了 云计算 行业的投资机会，并对 浦华众城信息有限公司</a:t>
-            </a:r>
-          </a:p>
-          <a:p>
-            <a:r>
-              <a:t>进行了重点评估。</a:t>
-            </a:r>
-          </a:p>
-          <a:p/>
-          <a:p/>
-          <a:p>
-            <a:r>
-              <a:t>根据内部财务模型测算，天益信息有限公司 在未来三年</a:t>
-            </a:r>
-          </a:p>
-          <a:p>
-            <a:r>
-              <a:t>收入复合增长率预计可达到 16% 左右。</a:t>
-            </a:r>
-          </a:p>
-          <a:p>
-            <a:r>
-              <a:t>该预测基于行业需求增长以及公司产能扩张计划。</a:t>
+              <a:t>华成育卓科技有限公司 是中国 医疗科技 行业的重要企业之一。</a:t>
+            </a:r>
+          </a:p>
+          <a:p>
+            <a:r>
+              <a:t>根据华辰资本 风险管理部 的研究，该公司成立于 2020 年，</a:t>
+            </a:r>
+          </a:p>
+          <a:p>
+            <a:r>
+              <a:t>目前员工规模约 650 人。公司近年来持续加大研发投入，</a:t>
+            </a:r>
+          </a:p>
+          <a:p>
+            <a:r>
+              <a:t>在核心技术方面形成了较强的竞争壁垒。</a:t>
             </a:r>
           </a:p>
           <a:p/>
